--- a/write/507-ppt/examples/system-prototypes/candidate-a-swiss.pptx
+++ b/write/507-ppt/examples/system-prototypes/candidate-a-swiss.pptx
@@ -5,12 +5,12 @@
     <p:sldMasterId xmlns:r="http://schemas.openxmlformats.org/officeDocument/2006/relationships" id="2147483648" r:id="rId1"/>
   </p:sldMasterIdLst>
   <p:notesMasterIdLst>
-    <p:notesMasterId r:id="R1ef0634a92c24f45"/>
+    <p:notesMasterId r:id="Rdc82da29dde34d08"/>
   </p:notesMasterIdLst>
   <p:sldIdLst>
-    <p:sldId id="256" r:id="Raf160be2dc3a44bd"/>
-    <p:sldId id="257" r:id="Rfd0b186ac13b45e6"/>
-    <p:sldId id="258" r:id="Re833ab1c06a14886"/>
+    <p:sldId id="256" r:id="R501629665df6424e"/>
+    <p:sldId id="257" r:id="Rfadc41eb83964f9c"/>
+    <p:sldId id="258" r:id="Rb02cb8804f4a43d8"/>
   </p:sldIdLst>
   <p:sldSz cx="12192000" cy="6858000"/>
   <p:notesSz cx="6858000" cy="9144000"/>
@@ -1356,10 +1356,10 @@
           <p:nvPr/>
         </p:nvPicPr>
         <p:blipFill>
-          <a:blip xmlns:r="http://schemas.openxmlformats.org/officeDocument/2006/relationships" xmlns:a="http://schemas.openxmlformats.org/drawingml/2006/main" r:embed="R2bb8d5eb18ea43d0">
+          <a:blip xmlns:r="http://schemas.openxmlformats.org/officeDocument/2006/relationships" xmlns:a="http://schemas.openxmlformats.org/drawingml/2006/main" r:embed="R5c15ee3fd889485b">
             <a:extLst>
               <a:ext uri="{96DAC541-7B7A-43D3-8B79-37D633B846F1}">
-                <asvg:svgBlip xmlns:asvg="http://schemas.microsoft.com/office/drawing/2016/SVG/main" r:embed="R2ddb2f29b25f46f5"/>
+                <asvg:svgBlip xmlns:asvg="http://schemas.microsoft.com/office/drawing/2016/SVG/main" r:embed="R656848ab00c34b9e"/>
               </a:ext>
             </a:extLst>
           </a:blip>
@@ -1369,8 +1369,8 @@
         </p:blipFill>
         <p:spPr>
           <a:xfrm xmlns:a="http://schemas.openxmlformats.org/drawingml/2006/main">
-            <a:off x="4140000" y="900000"/>
-            <a:ext cx="5220000" cy="3528000"/>
+            <a:off x="4140000" y="1195877"/>
+            <a:ext cx="5220000" cy="2936250"/>
           </a:xfrm>
           <a:prstGeom xmlns:a="http://schemas.openxmlformats.org/drawingml/2006/main" prst="rect">
             <a:avLst/>
